--- a/assets/figures-editable/c1-c2/c2-e25.pptx
+++ b/assets/figures-editable/c1-c2/c2-e25.pptx
@@ -7,7 +7,7 @@
   <p:sldIdLst>
     <p:sldId id="256" r:id="rId7"/>
   </p:sldIdLst>
-  <p:sldSz cx="11948160" cy="7924799" type="screen4x3"/>
+  <p:sldSz cx="12191695" cy="6858000" type="screen4x3"/>
   <p:notesSz cx="6858000" cy="9144000"/>
   <p:defaultTextStyle>
     <a:defPPr>
@@ -3098,14 +3098,14 @@
       <p:grpSpPr/>
       <p:sp>
         <p:nvSpPr>
-          <p:cNvPr id="2" name="text1" descr="sci-ppt:C2-E25-001"/>
+          <p:cNvPr id="2" name="C2-E25 text 0" descr="sci-ppt:o000"/>
           <p:cNvSpPr txBox="1"/>
           <p:nvPr/>
         </p:nvSpPr>
         <p:spPr>
           <a:xfrm>
-            <a:off x="316992" y="268224"/>
-            <a:ext cx="11277600" cy="359054"/>
+            <a:off x="274320" y="118872"/>
+            <a:ext cx="11612880" cy="340105"/>
           </a:xfrm>
           <a:prstGeom prst="rect">
             <a:avLst/>
@@ -3114,7 +3114,7 @@
           <a:effectLst/>
         </p:spPr>
         <p:txBody>
-          <a:bodyPr wrap="none" lIns="27432" rIns="27432" tIns="18288" bIns="18288" anchor="ctr">
+          <a:bodyPr wrap="none" lIns="18288" rIns="18288" tIns="18288" bIns="18288" anchor="t">
             <a:spAutoFit/>
           </a:bodyPr>
           <a:lstStyle/>
@@ -3125,34 +3125,31 @@
               </a:spcAft>
             </a:pPr>
             <a:r>
-              <a:rPr sz="1823" b="0" i="0">
+              <a:rPr sz="1900" b="1" i="0">
                 <a:solidFill>
                   <a:srgbClr val="8EDBD4"/>
                 </a:solidFill>
                 <a:latin typeface="Arial"/>
               </a:rPr>
-              <a:t>C2-E25 | Physical-variable diagram</a:t>
-            </a:r>
-          </a:p>
-        </p:txBody>
-      </p:sp>
-      <p:sp>
-        <p:nvSpPr>
-          <p:cNvPr id="3" name="rect2" descr="sci-ppt:C2-E25-002"/>
-          <p:cNvSpPr/>
-          <p:nvPr/>
-        </p:nvSpPr>
-        <p:spPr>
-          <a:xfrm>
-            <a:off x="731520" y="1463040"/>
-            <a:ext cx="3413760" cy="1158240"/>
-          </a:xfrm>
-          <a:prstGeom prst="rect">
-            <a:avLst/>
-          </a:prstGeom>
-          <a:solidFill>
-            <a:srgbClr val="213E4B"/>
-          </a:solidFill>
+              <a:t>C2-E25 · Derived ideal-pressure evolution identity</a:t>
+            </a:r>
+          </a:p>
+        </p:txBody>
+      </p:sp>
+      <p:cxnSp>
+        <p:nvCxnSpPr>
+          <p:cNvPr id="3" name="C2-E25 line 1" descr="sci-ppt:o001"/>
+          <p:cNvCxnSpPr/>
+          <p:nvPr/>
+        </p:nvCxnSpPr>
+        <p:spPr>
+          <a:xfrm>
+            <a:off x="914400" y="5029200"/>
+            <a:ext cx="6766560" cy="0"/>
+          </a:xfrm>
+          <a:prstGeom prst="line">
+            <a:avLst/>
+          </a:prstGeom>
           <a:ln w="19050">
             <a:solidFill>
               <a:srgbClr val="B4C7D2"/>
@@ -3160,24 +3157,83 @@
           </a:ln>
           <a:effectLst/>
         </p:spPr>
-        <p:txBody>
-          <a:bodyPr rtlCol="0" anchor="ctr"/>
-          <a:lstStyle/>
-          <a:p>
-            <a:pPr algn="ctr"/>
-          </a:p>
-        </p:txBody>
-      </p:sp>
-      <p:sp>
-        <p:nvSpPr>
-          <p:cNvPr id="4" name="text3" descr="sci-ppt:C2-E25-003"/>
+      </p:cxnSp>
+      <p:cxnSp>
+        <p:nvCxnSpPr>
+          <p:cNvPr id="4" name="C2-E25 line 2" descr="sci-ppt:o002"/>
+          <p:cNvCxnSpPr/>
+          <p:nvPr/>
+        </p:nvCxnSpPr>
+        <p:spPr>
+          <a:xfrm>
+            <a:off x="914400" y="1371600"/>
+            <a:ext cx="0" cy="3657600"/>
+          </a:xfrm>
+          <a:prstGeom prst="line">
+            <a:avLst/>
+          </a:prstGeom>
+          <a:ln w="19050">
+            <a:solidFill>
+              <a:srgbClr val="B4C7D2"/>
+            </a:solidFill>
+          </a:ln>
+          <a:effectLst/>
+        </p:spPr>
+      </p:cxnSp>
+      <p:cxnSp>
+        <p:nvCxnSpPr>
+          <p:cNvPr id="5" name="C2-E25 line 3" descr="sci-ppt:o003"/>
+          <p:cNvCxnSpPr/>
+          <p:nvPr/>
+        </p:nvCxnSpPr>
+        <p:spPr>
+          <a:xfrm>
+            <a:off x="850392" y="4907280"/>
+            <a:ext cx="64008" cy="0"/>
+          </a:xfrm>
+          <a:prstGeom prst="line">
+            <a:avLst/>
+          </a:prstGeom>
+          <a:ln w="12700">
+            <a:solidFill>
+              <a:srgbClr val="B4C7D2"/>
+            </a:solidFill>
+          </a:ln>
+          <a:effectLst/>
+        </p:spPr>
+      </p:cxnSp>
+      <p:cxnSp>
+        <p:nvCxnSpPr>
+          <p:cNvPr id="6" name="C2-E25 line 4" descr="sci-ppt:o004"/>
+          <p:cNvCxnSpPr/>
+          <p:nvPr/>
+        </p:nvCxnSpPr>
+        <p:spPr>
+          <a:xfrm>
+            <a:off x="914400" y="4907280"/>
+            <a:ext cx="6766560" cy="0"/>
+          </a:xfrm>
+          <a:prstGeom prst="line">
+            <a:avLst/>
+          </a:prstGeom>
+          <a:ln w="7620">
+            <a:solidFill>
+              <a:srgbClr val="2E4756"/>
+            </a:solidFill>
+          </a:ln>
+          <a:effectLst/>
+        </p:spPr>
+      </p:cxnSp>
+      <p:sp>
+        <p:nvSpPr>
+          <p:cNvPr id="7" name="C2-E25 text 5" descr="sci-ppt:o005"/>
           <p:cNvSpPr txBox="1"/>
           <p:nvPr/>
         </p:nvSpPr>
         <p:spPr>
           <a:xfrm>
-            <a:off x="853440" y="1584960"/>
-            <a:ext cx="3230880" cy="340156"/>
+            <a:off x="45720" y="4824984"/>
+            <a:ext cx="777240" cy="208407"/>
           </a:xfrm>
           <a:prstGeom prst="rect">
             <a:avLst/>
@@ -3186,7 +3242,467 @@
           <a:effectLst/>
         </p:spPr>
         <p:txBody>
-          <a:bodyPr wrap="none" lIns="27432" rIns="27432" tIns="18288" bIns="18288" anchor="ctr">
+          <a:bodyPr wrap="none" lIns="18288" rIns="18288" tIns="18288" bIns="18288" anchor="t">
+            <a:spAutoFit/>
+          </a:bodyPr>
+          <a:lstStyle/>
+          <a:p>
+            <a:pPr algn="r">
+              <a:spcAft>
+                <a:spcPts val="0"/>
+              </a:spcAft>
+            </a:pPr>
+            <a:r>
+              <a:rPr sz="1050" b="0" i="0">
+                <a:solidFill>
+                  <a:srgbClr val="B4C7D2"/>
+                </a:solidFill>
+                <a:latin typeface="Arial"/>
+              </a:rPr>
+              <a:t>-2</a:t>
+            </a:r>
+          </a:p>
+        </p:txBody>
+      </p:sp>
+      <p:cxnSp>
+        <p:nvCxnSpPr>
+          <p:cNvPr id="8" name="C2-E25 line 6" descr="sci-ppt:o006"/>
+          <p:cNvCxnSpPr/>
+          <p:nvPr/>
+        </p:nvCxnSpPr>
+        <p:spPr>
+          <a:xfrm>
+            <a:off x="850392" y="4297680"/>
+            <a:ext cx="64008" cy="0"/>
+          </a:xfrm>
+          <a:prstGeom prst="line">
+            <a:avLst/>
+          </a:prstGeom>
+          <a:ln w="12700">
+            <a:solidFill>
+              <a:srgbClr val="B4C7D2"/>
+            </a:solidFill>
+          </a:ln>
+          <a:effectLst/>
+        </p:spPr>
+      </p:cxnSp>
+      <p:cxnSp>
+        <p:nvCxnSpPr>
+          <p:cNvPr id="9" name="C2-E25 line 7" descr="sci-ppt:o007"/>
+          <p:cNvCxnSpPr/>
+          <p:nvPr/>
+        </p:nvCxnSpPr>
+        <p:spPr>
+          <a:xfrm>
+            <a:off x="914400" y="4297680"/>
+            <a:ext cx="6766560" cy="0"/>
+          </a:xfrm>
+          <a:prstGeom prst="line">
+            <a:avLst/>
+          </a:prstGeom>
+          <a:ln w="7620">
+            <a:solidFill>
+              <a:srgbClr val="2E4756"/>
+            </a:solidFill>
+          </a:ln>
+          <a:effectLst/>
+        </p:spPr>
+      </p:cxnSp>
+      <p:sp>
+        <p:nvSpPr>
+          <p:cNvPr id="10" name="C2-E25 text 8" descr="sci-ppt:o008"/>
+          <p:cNvSpPr txBox="1"/>
+          <p:nvPr/>
+        </p:nvSpPr>
+        <p:spPr>
+          <a:xfrm>
+            <a:off x="45720" y="4215384"/>
+            <a:ext cx="777240" cy="208407"/>
+          </a:xfrm>
+          <a:prstGeom prst="rect">
+            <a:avLst/>
+          </a:prstGeom>
+          <a:noFill/>
+          <a:effectLst/>
+        </p:spPr>
+        <p:txBody>
+          <a:bodyPr wrap="none" lIns="18288" rIns="18288" tIns="18288" bIns="18288" anchor="t">
+            <a:spAutoFit/>
+          </a:bodyPr>
+          <a:lstStyle/>
+          <a:p>
+            <a:pPr algn="r">
+              <a:spcAft>
+                <a:spcPts val="0"/>
+              </a:spcAft>
+            </a:pPr>
+            <a:r>
+              <a:rPr sz="1050" b="0" i="0">
+                <a:solidFill>
+                  <a:srgbClr val="B4C7D2"/>
+                </a:solidFill>
+                <a:latin typeface="Arial"/>
+              </a:rPr>
+              <a:t>-1</a:t>
+            </a:r>
+          </a:p>
+        </p:txBody>
+      </p:sp>
+      <p:cxnSp>
+        <p:nvCxnSpPr>
+          <p:cNvPr id="11" name="C2-E25 line 9" descr="sci-ppt:o009"/>
+          <p:cNvCxnSpPr/>
+          <p:nvPr/>
+        </p:nvCxnSpPr>
+        <p:spPr>
+          <a:xfrm>
+            <a:off x="850392" y="3688080"/>
+            <a:ext cx="64008" cy="0"/>
+          </a:xfrm>
+          <a:prstGeom prst="line">
+            <a:avLst/>
+          </a:prstGeom>
+          <a:ln w="12700">
+            <a:solidFill>
+              <a:srgbClr val="B4C7D2"/>
+            </a:solidFill>
+          </a:ln>
+          <a:effectLst/>
+        </p:spPr>
+      </p:cxnSp>
+      <p:cxnSp>
+        <p:nvCxnSpPr>
+          <p:cNvPr id="12" name="C2-E25 line 10" descr="sci-ppt:o010"/>
+          <p:cNvCxnSpPr/>
+          <p:nvPr/>
+        </p:nvCxnSpPr>
+        <p:spPr>
+          <a:xfrm>
+            <a:off x="914400" y="3688080"/>
+            <a:ext cx="6766560" cy="0"/>
+          </a:xfrm>
+          <a:prstGeom prst="line">
+            <a:avLst/>
+          </a:prstGeom>
+          <a:ln w="7620">
+            <a:solidFill>
+              <a:srgbClr val="2E4756"/>
+            </a:solidFill>
+          </a:ln>
+          <a:effectLst/>
+        </p:spPr>
+      </p:cxnSp>
+      <p:sp>
+        <p:nvSpPr>
+          <p:cNvPr id="13" name="C2-E25 text 11" descr="sci-ppt:o011"/>
+          <p:cNvSpPr txBox="1"/>
+          <p:nvPr/>
+        </p:nvSpPr>
+        <p:spPr>
+          <a:xfrm>
+            <a:off x="45720" y="3605784"/>
+            <a:ext cx="777240" cy="208407"/>
+          </a:xfrm>
+          <a:prstGeom prst="rect">
+            <a:avLst/>
+          </a:prstGeom>
+          <a:noFill/>
+          <a:effectLst/>
+        </p:spPr>
+        <p:txBody>
+          <a:bodyPr wrap="none" lIns="18288" rIns="18288" tIns="18288" bIns="18288" anchor="t">
+            <a:spAutoFit/>
+          </a:bodyPr>
+          <a:lstStyle/>
+          <a:p>
+            <a:pPr algn="r">
+              <a:spcAft>
+                <a:spcPts val="0"/>
+              </a:spcAft>
+            </a:pPr>
+            <a:r>
+              <a:rPr sz="1050" b="0" i="0">
+                <a:solidFill>
+                  <a:srgbClr val="B4C7D2"/>
+                </a:solidFill>
+                <a:latin typeface="Arial"/>
+              </a:rPr>
+              <a:t>0</a:t>
+            </a:r>
+          </a:p>
+        </p:txBody>
+      </p:sp>
+      <p:cxnSp>
+        <p:nvCxnSpPr>
+          <p:cNvPr id="14" name="C2-E25 line 12" descr="sci-ppt:o012"/>
+          <p:cNvCxnSpPr/>
+          <p:nvPr/>
+        </p:nvCxnSpPr>
+        <p:spPr>
+          <a:xfrm>
+            <a:off x="850392" y="3078480"/>
+            <a:ext cx="64008" cy="0"/>
+          </a:xfrm>
+          <a:prstGeom prst="line">
+            <a:avLst/>
+          </a:prstGeom>
+          <a:ln w="12700">
+            <a:solidFill>
+              <a:srgbClr val="B4C7D2"/>
+            </a:solidFill>
+          </a:ln>
+          <a:effectLst/>
+        </p:spPr>
+      </p:cxnSp>
+      <p:cxnSp>
+        <p:nvCxnSpPr>
+          <p:cNvPr id="15" name="C2-E25 line 13" descr="sci-ppt:o013"/>
+          <p:cNvCxnSpPr/>
+          <p:nvPr/>
+        </p:nvCxnSpPr>
+        <p:spPr>
+          <a:xfrm>
+            <a:off x="914400" y="3078480"/>
+            <a:ext cx="6766560" cy="0"/>
+          </a:xfrm>
+          <a:prstGeom prst="line">
+            <a:avLst/>
+          </a:prstGeom>
+          <a:ln w="7620">
+            <a:solidFill>
+              <a:srgbClr val="2E4756"/>
+            </a:solidFill>
+          </a:ln>
+          <a:effectLst/>
+        </p:spPr>
+      </p:cxnSp>
+      <p:sp>
+        <p:nvSpPr>
+          <p:cNvPr id="16" name="C2-E25 text 14" descr="sci-ppt:o014"/>
+          <p:cNvSpPr txBox="1"/>
+          <p:nvPr/>
+        </p:nvSpPr>
+        <p:spPr>
+          <a:xfrm>
+            <a:off x="45720" y="2996184"/>
+            <a:ext cx="777240" cy="208407"/>
+          </a:xfrm>
+          <a:prstGeom prst="rect">
+            <a:avLst/>
+          </a:prstGeom>
+          <a:noFill/>
+          <a:effectLst/>
+        </p:spPr>
+        <p:txBody>
+          <a:bodyPr wrap="none" lIns="18288" rIns="18288" tIns="18288" bIns="18288" anchor="t">
+            <a:spAutoFit/>
+          </a:bodyPr>
+          <a:lstStyle/>
+          <a:p>
+            <a:pPr algn="r">
+              <a:spcAft>
+                <a:spcPts val="0"/>
+              </a:spcAft>
+            </a:pPr>
+            <a:r>
+              <a:rPr sz="1050" b="0" i="0">
+                <a:solidFill>
+                  <a:srgbClr val="B4C7D2"/>
+                </a:solidFill>
+                <a:latin typeface="Arial"/>
+              </a:rPr>
+              <a:t>1</a:t>
+            </a:r>
+          </a:p>
+        </p:txBody>
+      </p:sp>
+      <p:cxnSp>
+        <p:nvCxnSpPr>
+          <p:cNvPr id="17" name="C2-E25 line 15" descr="sci-ppt:o015"/>
+          <p:cNvCxnSpPr/>
+          <p:nvPr/>
+        </p:nvCxnSpPr>
+        <p:spPr>
+          <a:xfrm>
+            <a:off x="850392" y="2468879"/>
+            <a:ext cx="64008" cy="0"/>
+          </a:xfrm>
+          <a:prstGeom prst="line">
+            <a:avLst/>
+          </a:prstGeom>
+          <a:ln w="12700">
+            <a:solidFill>
+              <a:srgbClr val="B4C7D2"/>
+            </a:solidFill>
+          </a:ln>
+          <a:effectLst/>
+        </p:spPr>
+      </p:cxnSp>
+      <p:cxnSp>
+        <p:nvCxnSpPr>
+          <p:cNvPr id="18" name="C2-E25 line 16" descr="sci-ppt:o016"/>
+          <p:cNvCxnSpPr/>
+          <p:nvPr/>
+        </p:nvCxnSpPr>
+        <p:spPr>
+          <a:xfrm>
+            <a:off x="914400" y="2468879"/>
+            <a:ext cx="6766560" cy="0"/>
+          </a:xfrm>
+          <a:prstGeom prst="line">
+            <a:avLst/>
+          </a:prstGeom>
+          <a:ln w="7620">
+            <a:solidFill>
+              <a:srgbClr val="2E4756"/>
+            </a:solidFill>
+          </a:ln>
+          <a:effectLst/>
+        </p:spPr>
+      </p:cxnSp>
+      <p:sp>
+        <p:nvSpPr>
+          <p:cNvPr id="19" name="C2-E25 text 17" descr="sci-ppt:o017"/>
+          <p:cNvSpPr txBox="1"/>
+          <p:nvPr/>
+        </p:nvSpPr>
+        <p:spPr>
+          <a:xfrm>
+            <a:off x="45720" y="2386584"/>
+            <a:ext cx="777240" cy="208407"/>
+          </a:xfrm>
+          <a:prstGeom prst="rect">
+            <a:avLst/>
+          </a:prstGeom>
+          <a:noFill/>
+          <a:effectLst/>
+        </p:spPr>
+        <p:txBody>
+          <a:bodyPr wrap="none" lIns="18288" rIns="18288" tIns="18288" bIns="18288" anchor="t">
+            <a:spAutoFit/>
+          </a:bodyPr>
+          <a:lstStyle/>
+          <a:p>
+            <a:pPr algn="r">
+              <a:spcAft>
+                <a:spcPts val="0"/>
+              </a:spcAft>
+            </a:pPr>
+            <a:r>
+              <a:rPr sz="1050" b="0" i="0">
+                <a:solidFill>
+                  <a:srgbClr val="B4C7D2"/>
+                </a:solidFill>
+                <a:latin typeface="Arial"/>
+              </a:rPr>
+              <a:t>2</a:t>
+            </a:r>
+          </a:p>
+        </p:txBody>
+      </p:sp>
+      <p:cxnSp>
+        <p:nvCxnSpPr>
+          <p:cNvPr id="20" name="C2-E25 line 18" descr="sci-ppt:o018"/>
+          <p:cNvCxnSpPr/>
+          <p:nvPr/>
+        </p:nvCxnSpPr>
+        <p:spPr>
+          <a:xfrm>
+            <a:off x="850392" y="1859280"/>
+            <a:ext cx="64008" cy="0"/>
+          </a:xfrm>
+          <a:prstGeom prst="line">
+            <a:avLst/>
+          </a:prstGeom>
+          <a:ln w="12700">
+            <a:solidFill>
+              <a:srgbClr val="B4C7D2"/>
+            </a:solidFill>
+          </a:ln>
+          <a:effectLst/>
+        </p:spPr>
+      </p:cxnSp>
+      <p:cxnSp>
+        <p:nvCxnSpPr>
+          <p:cNvPr id="21" name="C2-E25 line 19" descr="sci-ppt:o019"/>
+          <p:cNvCxnSpPr/>
+          <p:nvPr/>
+        </p:nvCxnSpPr>
+        <p:spPr>
+          <a:xfrm>
+            <a:off x="914400" y="1859280"/>
+            <a:ext cx="6766560" cy="0"/>
+          </a:xfrm>
+          <a:prstGeom prst="line">
+            <a:avLst/>
+          </a:prstGeom>
+          <a:ln w="7620">
+            <a:solidFill>
+              <a:srgbClr val="2E4756"/>
+            </a:solidFill>
+          </a:ln>
+          <a:effectLst/>
+        </p:spPr>
+      </p:cxnSp>
+      <p:sp>
+        <p:nvSpPr>
+          <p:cNvPr id="22" name="C2-E25 text 20" descr="sci-ppt:o020"/>
+          <p:cNvSpPr txBox="1"/>
+          <p:nvPr/>
+        </p:nvSpPr>
+        <p:spPr>
+          <a:xfrm>
+            <a:off x="45720" y="1776983"/>
+            <a:ext cx="777240" cy="208407"/>
+          </a:xfrm>
+          <a:prstGeom prst="rect">
+            <a:avLst/>
+          </a:prstGeom>
+          <a:noFill/>
+          <a:effectLst/>
+        </p:spPr>
+        <p:txBody>
+          <a:bodyPr wrap="none" lIns="18288" rIns="18288" tIns="18288" bIns="18288" anchor="t">
+            <a:spAutoFit/>
+          </a:bodyPr>
+          <a:lstStyle/>
+          <a:p>
+            <a:pPr algn="r">
+              <a:spcAft>
+                <a:spcPts val="0"/>
+              </a:spcAft>
+            </a:pPr>
+            <a:r>
+              <a:rPr sz="1050" b="0" i="0">
+                <a:solidFill>
+                  <a:srgbClr val="B4C7D2"/>
+                </a:solidFill>
+                <a:latin typeface="Arial"/>
+              </a:rPr>
+              <a:t>3</a:t>
+            </a:r>
+          </a:p>
+        </p:txBody>
+      </p:sp>
+      <p:sp>
+        <p:nvSpPr>
+          <p:cNvPr id="23" name="C2-E25 text 21" descr="sci-ppt:o021"/>
+          <p:cNvSpPr txBox="1"/>
+          <p:nvPr/>
+        </p:nvSpPr>
+        <p:spPr>
+          <a:xfrm>
+            <a:off x="365760" y="1024128"/>
+            <a:ext cx="6766560" cy="231648"/>
+          </a:xfrm>
+          <a:prstGeom prst="rect">
+            <a:avLst/>
+          </a:prstGeom>
+          <a:noFill/>
+          <a:effectLst/>
+        </p:spPr>
+        <p:txBody>
+          <a:bodyPr wrap="none" lIns="18288" rIns="18288" tIns="18288" bIns="18288" anchor="t">
             <a:spAutoFit/>
           </a:bodyPr>
           <a:lstStyle/>
@@ -3197,65 +3713,67 @@
               </a:spcAft>
             </a:pPr>
             <a:r>
-              <a:rPr sz="1728" b="0" i="0">
+              <a:rPr sz="1200" b="0" i="0">
                 <a:solidFill>
                   <a:srgbClr val="E7F0F3"/>
                 </a:solidFill>
                 <a:latin typeface="Arial"/>
               </a:rPr>
-              <a:t>Species masses m_v,s</a:t>
+              <a:t>relative rate  (1/µs)</a:t>
             </a:r>
           </a:p>
         </p:txBody>
       </p:sp>
       <p:cxnSp>
         <p:nvCxnSpPr>
-          <p:cNvPr id="5" name="arrow4" descr="sci-ppt:C2-E25-004"/>
+          <p:cNvPr id="24" name="C2-E25 line 22" descr="sci-ppt:o022"/>
           <p:cNvCxnSpPr/>
           <p:nvPr/>
         </p:nvCxnSpPr>
         <p:spPr>
           <a:xfrm>
-            <a:off x="2438400" y="2743200"/>
-            <a:ext cx="3535680" cy="975360"/>
+            <a:off x="914400" y="3688080"/>
+            <a:ext cx="6766560" cy="0"/>
           </a:xfrm>
           <a:prstGeom prst="line">
             <a:avLst/>
           </a:prstGeom>
-          <a:ln w="25400">
-            <a:solidFill>
-              <a:srgbClr val="8EDBD4"/>
-            </a:solidFill>
-            <a:headEnd type="none" w="med" len="med"/>
-            <a:tailEnd type="triangle" w="med" len="med"/>
-          </a:ln>
-          <a:effectLst/>
-        </p:spPr>
-      </p:cxnSp>
-      <p:sp>
-        <p:nvSpPr>
-          <p:cNvPr id="6" name="rect5" descr="sci-ppt:C2-E25-005"/>
-          <p:cNvSpPr/>
-          <p:nvPr/>
-        </p:nvSpPr>
-        <p:spPr>
-          <a:xfrm>
-            <a:off x="4511040" y="1463040"/>
-            <a:ext cx="3413760" cy="1158240"/>
-          </a:xfrm>
-          <a:prstGeom prst="rect">
-            <a:avLst/>
-          </a:prstGeom>
-          <a:solidFill>
-            <a:srgbClr val="213E4B"/>
-          </a:solidFill>
-          <a:ln w="19050">
+          <a:ln w="16510">
             <a:solidFill>
               <a:srgbClr val="B4C7D2"/>
             </a:solidFill>
           </a:ln>
           <a:effectLst/>
         </p:spPr>
+      </p:cxnSp>
+      <p:sp>
+        <p:nvSpPr>
+          <p:cNvPr id="25" name="C2-E25 rect 23" descr="sci-ppt:o023"/>
+          <p:cNvSpPr/>
+          <p:nvPr/>
+        </p:nvSpPr>
+        <p:spPr>
+          <a:xfrm>
+            <a:off x="1049731" y="3200400"/>
+            <a:ext cx="405993" cy="487679"/>
+          </a:xfrm>
+          <a:prstGeom prst="rect">
+            <a:avLst/>
+          </a:prstGeom>
+          <a:solidFill>
+            <a:srgbClr val="8EDBD4">
+              <a:alpha val="85000"/>
+            </a:srgbClr>
+          </a:solidFill>
+          <a:ln w="12700">
+            <a:solidFill>
+              <a:srgbClr val="8EDBD4">
+                <a:alpha val="85000"/>
+              </a:srgbClr>
+            </a:solidFill>
+          </a:ln>
+          <a:effectLst/>
+        </p:spPr>
         <p:txBody>
           <a:bodyPr rtlCol="0" anchor="ctr"/>
           <a:lstStyle/>
@@ -3266,14 +3784,14 @@
       </p:sp>
       <p:sp>
         <p:nvSpPr>
-          <p:cNvPr id="7" name="text6" descr="sci-ppt:C2-E25-006"/>
+          <p:cNvPr id="26" name="C2-E25 text 24" descr="sci-ppt:o024"/>
           <p:cNvSpPr txBox="1"/>
           <p:nvPr/>
         </p:nvSpPr>
         <p:spPr>
           <a:xfrm>
-            <a:off x="4632960" y="1584960"/>
-            <a:ext cx="3230880" cy="340156"/>
+            <a:off x="866851" y="2953512"/>
+            <a:ext cx="771753" cy="216153"/>
           </a:xfrm>
           <a:prstGeom prst="rect">
             <a:avLst/>
@@ -3282,7 +3800,1039 @@
           <a:effectLst/>
         </p:spPr>
         <p:txBody>
-          <a:bodyPr wrap="none" lIns="27432" rIns="27432" tIns="18288" bIns="18288" anchor="ctr">
+          <a:bodyPr wrap="none" lIns="18288" rIns="18288" tIns="18288" bIns="18288" anchor="t">
+            <a:spAutoFit/>
+          </a:bodyPr>
+          <a:lstStyle/>
+          <a:p>
+            <a:pPr algn="ctr">
+              <a:spcAft>
+                <a:spcPts val="0"/>
+              </a:spcAft>
+            </a:pPr>
+            <a:r>
+              <a:rPr sz="1100" b="0" i="0">
+                <a:solidFill>
+                  <a:srgbClr val="E7F0F3"/>
+                </a:solidFill>
+                <a:latin typeface="Arial"/>
+              </a:rPr>
+              <a:t>+0.8</a:t>
+            </a:r>
+          </a:p>
+        </p:txBody>
+      </p:sp>
+      <p:sp>
+        <p:nvSpPr>
+          <p:cNvPr id="27" name="C2-E25 rect 25" descr="sci-ppt:o025"/>
+          <p:cNvSpPr/>
+          <p:nvPr/>
+        </p:nvSpPr>
+        <p:spPr>
+          <a:xfrm>
+            <a:off x="1545945" y="3688080"/>
+            <a:ext cx="405993" cy="182880"/>
+          </a:xfrm>
+          <a:prstGeom prst="rect">
+            <a:avLst/>
+          </a:prstGeom>
+          <a:solidFill>
+            <a:srgbClr val="F28BA0">
+              <a:alpha val="85000"/>
+            </a:srgbClr>
+          </a:solidFill>
+          <a:ln w="12700">
+            <a:solidFill>
+              <a:srgbClr val="F28BA0">
+                <a:alpha val="85000"/>
+              </a:srgbClr>
+            </a:solidFill>
+          </a:ln>
+          <a:effectLst/>
+        </p:spPr>
+        <p:txBody>
+          <a:bodyPr rtlCol="0" anchor="ctr"/>
+          <a:lstStyle/>
+          <a:p>
+            <a:pPr algn="ctr"/>
+          </a:p>
+        </p:txBody>
+      </p:sp>
+      <p:sp>
+        <p:nvSpPr>
+          <p:cNvPr id="28" name="C2-E25 text 26" descr="sci-ppt:o026"/>
+          <p:cNvSpPr txBox="1"/>
+          <p:nvPr/>
+        </p:nvSpPr>
+        <p:spPr>
+          <a:xfrm>
+            <a:off x="1363065" y="3898392"/>
+            <a:ext cx="771753" cy="216153"/>
+          </a:xfrm>
+          <a:prstGeom prst="rect">
+            <a:avLst/>
+          </a:prstGeom>
+          <a:noFill/>
+          <a:effectLst/>
+        </p:spPr>
+        <p:txBody>
+          <a:bodyPr wrap="none" lIns="18288" rIns="18288" tIns="18288" bIns="18288" anchor="t">
+            <a:spAutoFit/>
+          </a:bodyPr>
+          <a:lstStyle/>
+          <a:p>
+            <a:pPr algn="ctr">
+              <a:spcAft>
+                <a:spcPts val="0"/>
+              </a:spcAft>
+            </a:pPr>
+            <a:r>
+              <a:rPr sz="1100" b="0" i="0">
+                <a:solidFill>
+                  <a:srgbClr val="E7F0F3"/>
+                </a:solidFill>
+                <a:latin typeface="Arial"/>
+              </a:rPr>
+              <a:t>-0.3</a:t>
+            </a:r>
+          </a:p>
+        </p:txBody>
+      </p:sp>
+      <p:sp>
+        <p:nvSpPr>
+          <p:cNvPr id="29" name="C2-E25 rect 27" descr="sci-ppt:o027"/>
+          <p:cNvSpPr/>
+          <p:nvPr/>
+        </p:nvSpPr>
+        <p:spPr>
+          <a:xfrm>
+            <a:off x="2042160" y="3688080"/>
+            <a:ext cx="405993" cy="914400"/>
+          </a:xfrm>
+          <a:prstGeom prst="rect">
+            <a:avLst/>
+          </a:prstGeom>
+          <a:solidFill>
+            <a:srgbClr val="F2B880">
+              <a:alpha val="85000"/>
+            </a:srgbClr>
+          </a:solidFill>
+          <a:ln w="12700">
+            <a:solidFill>
+              <a:srgbClr val="F2B880">
+                <a:alpha val="85000"/>
+              </a:srgbClr>
+            </a:solidFill>
+          </a:ln>
+          <a:effectLst/>
+        </p:spPr>
+        <p:txBody>
+          <a:bodyPr rtlCol="0" anchor="ctr"/>
+          <a:lstStyle/>
+          <a:p>
+            <a:pPr algn="ctr"/>
+          </a:p>
+        </p:txBody>
+      </p:sp>
+      <p:sp>
+        <p:nvSpPr>
+          <p:cNvPr id="30" name="C2-E25 text 28" descr="sci-ppt:o028"/>
+          <p:cNvSpPr txBox="1"/>
+          <p:nvPr/>
+        </p:nvSpPr>
+        <p:spPr>
+          <a:xfrm>
+            <a:off x="1859280" y="4629912"/>
+            <a:ext cx="771753" cy="216153"/>
+          </a:xfrm>
+          <a:prstGeom prst="rect">
+            <a:avLst/>
+          </a:prstGeom>
+          <a:noFill/>
+          <a:effectLst/>
+        </p:spPr>
+        <p:txBody>
+          <a:bodyPr wrap="none" lIns="18288" rIns="18288" tIns="18288" bIns="18288" anchor="t">
+            <a:spAutoFit/>
+          </a:bodyPr>
+          <a:lstStyle/>
+          <a:p>
+            <a:pPr algn="ctr">
+              <a:spcAft>
+                <a:spcPts val="0"/>
+              </a:spcAft>
+            </a:pPr>
+            <a:r>
+              <a:rPr sz="1100" b="0" i="0">
+                <a:solidFill>
+                  <a:srgbClr val="E7F0F3"/>
+                </a:solidFill>
+                <a:latin typeface="Arial"/>
+              </a:rPr>
+              <a:t>-1.5</a:t>
+            </a:r>
+          </a:p>
+        </p:txBody>
+      </p:sp>
+      <p:sp>
+        <p:nvSpPr>
+          <p:cNvPr id="31" name="C2-E25 rect 29" descr="sci-ppt:o029"/>
+          <p:cNvSpPr/>
+          <p:nvPr/>
+        </p:nvSpPr>
+        <p:spPr>
+          <a:xfrm>
+            <a:off x="2538374" y="3688080"/>
+            <a:ext cx="405993" cy="609600"/>
+          </a:xfrm>
+          <a:prstGeom prst="rect">
+            <a:avLst/>
+          </a:prstGeom>
+          <a:solidFill>
+            <a:srgbClr val="FFFFFF">
+              <a:alpha val="35000"/>
+            </a:srgbClr>
+          </a:solidFill>
+          <a:ln w="12700">
+            <a:solidFill>
+              <a:srgbClr val="FFFFFF">
+                <a:alpha val="35000"/>
+              </a:srgbClr>
+            </a:solidFill>
+          </a:ln>
+          <a:effectLst/>
+        </p:spPr>
+        <p:txBody>
+          <a:bodyPr rtlCol="0" anchor="ctr"/>
+          <a:lstStyle/>
+          <a:p>
+            <a:pPr algn="ctr"/>
+          </a:p>
+        </p:txBody>
+      </p:sp>
+      <p:sp>
+        <p:nvSpPr>
+          <p:cNvPr id="32" name="C2-E25 text 30" descr="sci-ppt:o030"/>
+          <p:cNvSpPr txBox="1"/>
+          <p:nvPr/>
+        </p:nvSpPr>
+        <p:spPr>
+          <a:xfrm>
+            <a:off x="2355494" y="4325112"/>
+            <a:ext cx="771753" cy="216153"/>
+          </a:xfrm>
+          <a:prstGeom prst="rect">
+            <a:avLst/>
+          </a:prstGeom>
+          <a:noFill/>
+          <a:effectLst/>
+        </p:spPr>
+        <p:txBody>
+          <a:bodyPr wrap="none" lIns="18288" rIns="18288" tIns="18288" bIns="18288" anchor="t">
+            <a:spAutoFit/>
+          </a:bodyPr>
+          <a:lstStyle/>
+          <a:p>
+            <a:pPr algn="ctr">
+              <a:spcAft>
+                <a:spcPts val="0"/>
+              </a:spcAft>
+            </a:pPr>
+            <a:r>
+              <a:rPr sz="1100" b="0" i="0">
+                <a:solidFill>
+                  <a:srgbClr val="E7F0F3"/>
+                </a:solidFill>
+                <a:latin typeface="Arial"/>
+              </a:rPr>
+              <a:t>-1.0</a:t>
+            </a:r>
+          </a:p>
+        </p:txBody>
+      </p:sp>
+      <p:sp>
+        <p:nvSpPr>
+          <p:cNvPr id="33" name="C2-E25 text 31" descr="sci-ppt:o031"/>
+          <p:cNvSpPr txBox="1"/>
+          <p:nvPr/>
+        </p:nvSpPr>
+        <p:spPr>
+          <a:xfrm>
+            <a:off x="1005840" y="4907280"/>
+            <a:ext cx="2194560" cy="239395"/>
+          </a:xfrm>
+          <a:prstGeom prst="rect">
+            <a:avLst/>
+          </a:prstGeom>
+          <a:noFill/>
+          <a:effectLst/>
+        </p:spPr>
+        <p:txBody>
+          <a:bodyPr wrap="none" lIns="18288" rIns="18288" tIns="18288" bIns="18288" anchor="t">
+            <a:spAutoFit/>
+          </a:bodyPr>
+          <a:lstStyle/>
+          <a:p>
+            <a:pPr algn="ctr">
+              <a:spcAft>
+                <a:spcPts val="0"/>
+              </a:spcAft>
+            </a:pPr>
+            <a:r>
+              <a:rPr sz="1250" b="1" i="0">
+                <a:solidFill>
+                  <a:srgbClr val="B4C7D2"/>
+                </a:solidFill>
+                <a:latin typeface="Arial"/>
+              </a:rPr>
+              <a:t>rapid growth</a:t>
+            </a:r>
+          </a:p>
+        </p:txBody>
+      </p:sp>
+      <p:sp>
+        <p:nvSpPr>
+          <p:cNvPr id="34" name="C2-E25 rect 32" descr="sci-ppt:o032"/>
+          <p:cNvSpPr/>
+          <p:nvPr/>
+        </p:nvSpPr>
+        <p:spPr>
+          <a:xfrm>
+            <a:off x="3305251" y="3627120"/>
+            <a:ext cx="405993" cy="60959"/>
+          </a:xfrm>
+          <a:prstGeom prst="rect">
+            <a:avLst/>
+          </a:prstGeom>
+          <a:solidFill>
+            <a:srgbClr val="8EDBD4">
+              <a:alpha val="85000"/>
+            </a:srgbClr>
+          </a:solidFill>
+          <a:ln w="12700">
+            <a:solidFill>
+              <a:srgbClr val="8EDBD4">
+                <a:alpha val="85000"/>
+              </a:srgbClr>
+            </a:solidFill>
+          </a:ln>
+          <a:effectLst/>
+        </p:spPr>
+        <p:txBody>
+          <a:bodyPr rtlCol="0" anchor="ctr"/>
+          <a:lstStyle/>
+          <a:p>
+            <a:pPr algn="ctr"/>
+          </a:p>
+        </p:txBody>
+      </p:sp>
+      <p:sp>
+        <p:nvSpPr>
+          <p:cNvPr id="35" name="C2-E25 text 33" descr="sci-ppt:o033"/>
+          <p:cNvSpPr txBox="1"/>
+          <p:nvPr/>
+        </p:nvSpPr>
+        <p:spPr>
+          <a:xfrm>
+            <a:off x="3122371" y="3380232"/>
+            <a:ext cx="771753" cy="216153"/>
+          </a:xfrm>
+          <a:prstGeom prst="rect">
+            <a:avLst/>
+          </a:prstGeom>
+          <a:noFill/>
+          <a:effectLst/>
+        </p:spPr>
+        <p:txBody>
+          <a:bodyPr wrap="none" lIns="18288" rIns="18288" tIns="18288" bIns="18288" anchor="t">
+            <a:spAutoFit/>
+          </a:bodyPr>
+          <a:lstStyle/>
+          <a:p>
+            <a:pPr algn="ctr">
+              <a:spcAft>
+                <a:spcPts val="0"/>
+              </a:spcAft>
+            </a:pPr>
+            <a:r>
+              <a:rPr sz="1100" b="0" i="0">
+                <a:solidFill>
+                  <a:srgbClr val="E7F0F3"/>
+                </a:solidFill>
+                <a:latin typeface="Arial"/>
+              </a:rPr>
+              <a:t>+0.1</a:t>
+            </a:r>
+          </a:p>
+        </p:txBody>
+      </p:sp>
+      <p:sp>
+        <p:nvSpPr>
+          <p:cNvPr id="36" name="C2-E25 rect 34" descr="sci-ppt:o034"/>
+          <p:cNvSpPr/>
+          <p:nvPr/>
+        </p:nvSpPr>
+        <p:spPr>
+          <a:xfrm>
+            <a:off x="3801465" y="3688080"/>
+            <a:ext cx="405993" cy="60959"/>
+          </a:xfrm>
+          <a:prstGeom prst="rect">
+            <a:avLst/>
+          </a:prstGeom>
+          <a:solidFill>
+            <a:srgbClr val="F28BA0">
+              <a:alpha val="85000"/>
+            </a:srgbClr>
+          </a:solidFill>
+          <a:ln w="12700">
+            <a:solidFill>
+              <a:srgbClr val="F28BA0">
+                <a:alpha val="85000"/>
+              </a:srgbClr>
+            </a:solidFill>
+          </a:ln>
+          <a:effectLst/>
+        </p:spPr>
+        <p:txBody>
+          <a:bodyPr rtlCol="0" anchor="ctr"/>
+          <a:lstStyle/>
+          <a:p>
+            <a:pPr algn="ctr"/>
+          </a:p>
+        </p:txBody>
+      </p:sp>
+      <p:sp>
+        <p:nvSpPr>
+          <p:cNvPr id="37" name="C2-E25 text 35" descr="sci-ppt:o035"/>
+          <p:cNvSpPr txBox="1"/>
+          <p:nvPr/>
+        </p:nvSpPr>
+        <p:spPr>
+          <a:xfrm>
+            <a:off x="3618585" y="3776472"/>
+            <a:ext cx="771753" cy="216153"/>
+          </a:xfrm>
+          <a:prstGeom prst="rect">
+            <a:avLst/>
+          </a:prstGeom>
+          <a:noFill/>
+          <a:effectLst/>
+        </p:spPr>
+        <p:txBody>
+          <a:bodyPr wrap="none" lIns="18288" rIns="18288" tIns="18288" bIns="18288" anchor="t">
+            <a:spAutoFit/>
+          </a:bodyPr>
+          <a:lstStyle/>
+          <a:p>
+            <a:pPr algn="ctr">
+              <a:spcAft>
+                <a:spcPts val="0"/>
+              </a:spcAft>
+            </a:pPr>
+            <a:r>
+              <a:rPr sz="1100" b="0" i="0">
+                <a:solidFill>
+                  <a:srgbClr val="E7F0F3"/>
+                </a:solidFill>
+                <a:latin typeface="Arial"/>
+              </a:rPr>
+              <a:t>-0.1</a:t>
+            </a:r>
+          </a:p>
+        </p:txBody>
+      </p:sp>
+      <p:sp>
+        <p:nvSpPr>
+          <p:cNvPr id="38" name="C2-E25 rect 36" descr="sci-ppt:o036"/>
+          <p:cNvSpPr/>
+          <p:nvPr/>
+        </p:nvSpPr>
+        <p:spPr>
+          <a:xfrm>
+            <a:off x="4297680" y="3688080"/>
+            <a:ext cx="405993" cy="365760"/>
+          </a:xfrm>
+          <a:prstGeom prst="rect">
+            <a:avLst/>
+          </a:prstGeom>
+          <a:solidFill>
+            <a:srgbClr val="F2B880">
+              <a:alpha val="85000"/>
+            </a:srgbClr>
+          </a:solidFill>
+          <a:ln w="12700">
+            <a:solidFill>
+              <a:srgbClr val="F2B880">
+                <a:alpha val="85000"/>
+              </a:srgbClr>
+            </a:solidFill>
+          </a:ln>
+          <a:effectLst/>
+        </p:spPr>
+        <p:txBody>
+          <a:bodyPr rtlCol="0" anchor="ctr"/>
+          <a:lstStyle/>
+          <a:p>
+            <a:pPr algn="ctr"/>
+          </a:p>
+        </p:txBody>
+      </p:sp>
+      <p:sp>
+        <p:nvSpPr>
+          <p:cNvPr id="39" name="C2-E25 text 37" descr="sci-ppt:o037"/>
+          <p:cNvSpPr txBox="1"/>
+          <p:nvPr/>
+        </p:nvSpPr>
+        <p:spPr>
+          <a:xfrm>
+            <a:off x="4114800" y="4081272"/>
+            <a:ext cx="771753" cy="216153"/>
+          </a:xfrm>
+          <a:prstGeom prst="rect">
+            <a:avLst/>
+          </a:prstGeom>
+          <a:noFill/>
+          <a:effectLst/>
+        </p:spPr>
+        <p:txBody>
+          <a:bodyPr wrap="none" lIns="18288" rIns="18288" tIns="18288" bIns="18288" anchor="t">
+            <a:spAutoFit/>
+          </a:bodyPr>
+          <a:lstStyle/>
+          <a:p>
+            <a:pPr algn="ctr">
+              <a:spcAft>
+                <a:spcPts val="0"/>
+              </a:spcAft>
+            </a:pPr>
+            <a:r>
+              <a:rPr sz="1100" b="0" i="0">
+                <a:solidFill>
+                  <a:srgbClr val="E7F0F3"/>
+                </a:solidFill>
+                <a:latin typeface="Arial"/>
+              </a:rPr>
+              <a:t>-0.6</a:t>
+            </a:r>
+          </a:p>
+        </p:txBody>
+      </p:sp>
+      <p:sp>
+        <p:nvSpPr>
+          <p:cNvPr id="40" name="C2-E25 rect 38" descr="sci-ppt:o038"/>
+          <p:cNvSpPr/>
+          <p:nvPr/>
+        </p:nvSpPr>
+        <p:spPr>
+          <a:xfrm>
+            <a:off x="4793894" y="3688080"/>
+            <a:ext cx="405993" cy="365760"/>
+          </a:xfrm>
+          <a:prstGeom prst="rect">
+            <a:avLst/>
+          </a:prstGeom>
+          <a:solidFill>
+            <a:srgbClr val="FFFFFF">
+              <a:alpha val="35000"/>
+            </a:srgbClr>
+          </a:solidFill>
+          <a:ln w="12700">
+            <a:solidFill>
+              <a:srgbClr val="FFFFFF">
+                <a:alpha val="35000"/>
+              </a:srgbClr>
+            </a:solidFill>
+          </a:ln>
+          <a:effectLst/>
+        </p:spPr>
+        <p:txBody>
+          <a:bodyPr rtlCol="0" anchor="ctr"/>
+          <a:lstStyle/>
+          <a:p>
+            <a:pPr algn="ctr"/>
+          </a:p>
+        </p:txBody>
+      </p:sp>
+      <p:sp>
+        <p:nvSpPr>
+          <p:cNvPr id="41" name="C2-E25 text 39" descr="sci-ppt:o039"/>
+          <p:cNvSpPr txBox="1"/>
+          <p:nvPr/>
+        </p:nvSpPr>
+        <p:spPr>
+          <a:xfrm>
+            <a:off x="4611014" y="4081272"/>
+            <a:ext cx="771753" cy="216153"/>
+          </a:xfrm>
+          <a:prstGeom prst="rect">
+            <a:avLst/>
+          </a:prstGeom>
+          <a:noFill/>
+          <a:effectLst/>
+        </p:spPr>
+        <p:txBody>
+          <a:bodyPr wrap="none" lIns="18288" rIns="18288" tIns="18288" bIns="18288" anchor="t">
+            <a:spAutoFit/>
+          </a:bodyPr>
+          <a:lstStyle/>
+          <a:p>
+            <a:pPr algn="ctr">
+              <a:spcAft>
+                <a:spcPts val="0"/>
+              </a:spcAft>
+            </a:pPr>
+            <a:r>
+              <a:rPr sz="1100" b="0" i="0">
+                <a:solidFill>
+                  <a:srgbClr val="E7F0F3"/>
+                </a:solidFill>
+                <a:latin typeface="Arial"/>
+              </a:rPr>
+              <a:t>-0.6</a:t>
+            </a:r>
+          </a:p>
+        </p:txBody>
+      </p:sp>
+      <p:sp>
+        <p:nvSpPr>
+          <p:cNvPr id="42" name="C2-E25 text 40" descr="sci-ppt:o040"/>
+          <p:cNvSpPr txBox="1"/>
+          <p:nvPr/>
+        </p:nvSpPr>
+        <p:spPr>
+          <a:xfrm>
+            <a:off x="3261360" y="4907280"/>
+            <a:ext cx="2194560" cy="239395"/>
+          </a:xfrm>
+          <a:prstGeom prst="rect">
+            <a:avLst/>
+          </a:prstGeom>
+          <a:noFill/>
+          <a:effectLst/>
+        </p:spPr>
+        <p:txBody>
+          <a:bodyPr wrap="none" lIns="18288" rIns="18288" tIns="18288" bIns="18288" anchor="t">
+            <a:spAutoFit/>
+          </a:bodyPr>
+          <a:lstStyle/>
+          <a:p>
+            <a:pPr algn="ctr">
+              <a:spcAft>
+                <a:spcPts val="0"/>
+              </a:spcAft>
+            </a:pPr>
+            <a:r>
+              <a:rPr sz="1250" b="1" i="0">
+                <a:solidFill>
+                  <a:srgbClr val="B4C7D2"/>
+                </a:solidFill>
+                <a:latin typeface="Arial"/>
+              </a:rPr>
+              <a:t>slow growth</a:t>
+            </a:r>
+          </a:p>
+        </p:txBody>
+      </p:sp>
+      <p:sp>
+        <p:nvSpPr>
+          <p:cNvPr id="43" name="C2-E25 rect 41" descr="sci-ppt:o041"/>
+          <p:cNvSpPr/>
+          <p:nvPr/>
+        </p:nvSpPr>
+        <p:spPr>
+          <a:xfrm>
+            <a:off x="5560771" y="3688080"/>
+            <a:ext cx="405993" cy="18288"/>
+          </a:xfrm>
+          <a:prstGeom prst="rect">
+            <a:avLst/>
+          </a:prstGeom>
+          <a:solidFill>
+            <a:srgbClr val="8EDBD4">
+              <a:alpha val="85000"/>
+            </a:srgbClr>
+          </a:solidFill>
+          <a:ln w="12700">
+            <a:solidFill>
+              <a:srgbClr val="8EDBD4">
+                <a:alpha val="85000"/>
+              </a:srgbClr>
+            </a:solidFill>
+          </a:ln>
+          <a:effectLst/>
+        </p:spPr>
+        <p:txBody>
+          <a:bodyPr rtlCol="0" anchor="ctr"/>
+          <a:lstStyle/>
+          <a:p>
+            <a:pPr algn="ctr"/>
+          </a:p>
+        </p:txBody>
+      </p:sp>
+      <p:sp>
+        <p:nvSpPr>
+          <p:cNvPr id="44" name="C2-E25 text 42" descr="sci-ppt:o042"/>
+          <p:cNvSpPr txBox="1"/>
+          <p:nvPr/>
+        </p:nvSpPr>
+        <p:spPr>
+          <a:xfrm>
+            <a:off x="5377891" y="3441192"/>
+            <a:ext cx="771753" cy="216153"/>
+          </a:xfrm>
+          <a:prstGeom prst="rect">
+            <a:avLst/>
+          </a:prstGeom>
+          <a:noFill/>
+          <a:effectLst/>
+        </p:spPr>
+        <p:txBody>
+          <a:bodyPr wrap="none" lIns="18288" rIns="18288" tIns="18288" bIns="18288" anchor="t">
+            <a:spAutoFit/>
+          </a:bodyPr>
+          <a:lstStyle/>
+          <a:p>
+            <a:pPr algn="ctr">
+              <a:spcAft>
+                <a:spcPts val="0"/>
+              </a:spcAft>
+            </a:pPr>
+            <a:r>
+              <a:rPr sz="1100" b="0" i="0">
+                <a:solidFill>
+                  <a:srgbClr val="E7F0F3"/>
+                </a:solidFill>
+                <a:latin typeface="Arial"/>
+              </a:rPr>
+              <a:t>+0.0</a:t>
+            </a:r>
+          </a:p>
+        </p:txBody>
+      </p:sp>
+      <p:sp>
+        <p:nvSpPr>
+          <p:cNvPr id="45" name="C2-E25 rect 43" descr="sci-ppt:o043"/>
+          <p:cNvSpPr/>
+          <p:nvPr/>
+        </p:nvSpPr>
+        <p:spPr>
+          <a:xfrm>
+            <a:off x="6056985" y="3566159"/>
+            <a:ext cx="405993" cy="121920"/>
+          </a:xfrm>
+          <a:prstGeom prst="rect">
+            <a:avLst/>
+          </a:prstGeom>
+          <a:solidFill>
+            <a:srgbClr val="F28BA0">
+              <a:alpha val="85000"/>
+            </a:srgbClr>
+          </a:solidFill>
+          <a:ln w="12700">
+            <a:solidFill>
+              <a:srgbClr val="F28BA0">
+                <a:alpha val="85000"/>
+              </a:srgbClr>
+            </a:solidFill>
+          </a:ln>
+          <a:effectLst/>
+        </p:spPr>
+        <p:txBody>
+          <a:bodyPr rtlCol="0" anchor="ctr"/>
+          <a:lstStyle/>
+          <a:p>
+            <a:pPr algn="ctr"/>
+          </a:p>
+        </p:txBody>
+      </p:sp>
+      <p:sp>
+        <p:nvSpPr>
+          <p:cNvPr id="46" name="C2-E25 text 44" descr="sci-ppt:o044"/>
+          <p:cNvSpPr txBox="1"/>
+          <p:nvPr/>
+        </p:nvSpPr>
+        <p:spPr>
+          <a:xfrm>
+            <a:off x="5874105" y="3319271"/>
+            <a:ext cx="771753" cy="216153"/>
+          </a:xfrm>
+          <a:prstGeom prst="rect">
+            <a:avLst/>
+          </a:prstGeom>
+          <a:noFill/>
+          <a:effectLst/>
+        </p:spPr>
+        <p:txBody>
+          <a:bodyPr wrap="none" lIns="18288" rIns="18288" tIns="18288" bIns="18288" anchor="t">
+            <a:spAutoFit/>
+          </a:bodyPr>
+          <a:lstStyle/>
+          <a:p>
+            <a:pPr algn="ctr">
+              <a:spcAft>
+                <a:spcPts val="0"/>
+              </a:spcAft>
+            </a:pPr>
+            <a:r>
+              <a:rPr sz="1100" b="0" i="0">
+                <a:solidFill>
+                  <a:srgbClr val="E7F0F3"/>
+                </a:solidFill>
+                <a:latin typeface="Arial"/>
+              </a:rPr>
+              <a:t>+0.2</a:t>
+            </a:r>
+          </a:p>
+        </p:txBody>
+      </p:sp>
+      <p:sp>
+        <p:nvSpPr>
+          <p:cNvPr id="47" name="C2-E25 rect 45" descr="sci-ppt:o045"/>
+          <p:cNvSpPr/>
+          <p:nvPr/>
+        </p:nvSpPr>
+        <p:spPr>
+          <a:xfrm>
+            <a:off x="6553200" y="1859280"/>
+            <a:ext cx="405993" cy="1828800"/>
+          </a:xfrm>
+          <a:prstGeom prst="rect">
+            <a:avLst/>
+          </a:prstGeom>
+          <a:solidFill>
+            <a:srgbClr val="F2B880">
+              <a:alpha val="85000"/>
+            </a:srgbClr>
+          </a:solidFill>
+          <a:ln w="12700">
+            <a:solidFill>
+              <a:srgbClr val="F2B880">
+                <a:alpha val="85000"/>
+              </a:srgbClr>
+            </a:solidFill>
+          </a:ln>
+          <a:effectLst/>
+        </p:spPr>
+        <p:txBody>
+          <a:bodyPr rtlCol="0" anchor="ctr"/>
+          <a:lstStyle/>
+          <a:p>
+            <a:pPr algn="ctr"/>
+          </a:p>
+        </p:txBody>
+      </p:sp>
+      <p:sp>
+        <p:nvSpPr>
+          <p:cNvPr id="48" name="C2-E25 text 46" descr="sci-ppt:o046"/>
+          <p:cNvSpPr txBox="1"/>
+          <p:nvPr/>
+        </p:nvSpPr>
+        <p:spPr>
+          <a:xfrm>
+            <a:off x="6370320" y="1612391"/>
+            <a:ext cx="771753" cy="216153"/>
+          </a:xfrm>
+          <a:prstGeom prst="rect">
+            <a:avLst/>
+          </a:prstGeom>
+          <a:noFill/>
+          <a:effectLst/>
+        </p:spPr>
+        <p:txBody>
+          <a:bodyPr wrap="none" lIns="18288" rIns="18288" tIns="18288" bIns="18288" anchor="t">
+            <a:spAutoFit/>
+          </a:bodyPr>
+          <a:lstStyle/>
+          <a:p>
+            <a:pPr algn="ctr">
+              <a:spcAft>
+                <a:spcPts val="0"/>
+              </a:spcAft>
+            </a:pPr>
+            <a:r>
+              <a:rPr sz="1100" b="0" i="0">
+                <a:solidFill>
+                  <a:srgbClr val="E7F0F3"/>
+                </a:solidFill>
+                <a:latin typeface="Arial"/>
+              </a:rPr>
+              <a:t>+3.0</a:t>
+            </a:r>
+          </a:p>
+        </p:txBody>
+      </p:sp>
+      <p:sp>
+        <p:nvSpPr>
+          <p:cNvPr id="49" name="C2-E25 rect 47" descr="sci-ppt:o047"/>
+          <p:cNvSpPr/>
+          <p:nvPr/>
+        </p:nvSpPr>
+        <p:spPr>
+          <a:xfrm>
+            <a:off x="7049414" y="1737360"/>
+            <a:ext cx="405993" cy="1950720"/>
+          </a:xfrm>
+          <a:prstGeom prst="rect">
+            <a:avLst/>
+          </a:prstGeom>
+          <a:solidFill>
+            <a:srgbClr val="FFFFFF">
+              <a:alpha val="35000"/>
+            </a:srgbClr>
+          </a:solidFill>
+          <a:ln w="12700">
+            <a:solidFill>
+              <a:srgbClr val="FFFFFF">
+                <a:alpha val="35000"/>
+              </a:srgbClr>
+            </a:solidFill>
+          </a:ln>
+          <a:effectLst/>
+        </p:spPr>
+        <p:txBody>
+          <a:bodyPr rtlCol="0" anchor="ctr"/>
+          <a:lstStyle/>
+          <a:p>
+            <a:pPr algn="ctr"/>
+          </a:p>
+        </p:txBody>
+      </p:sp>
+      <p:sp>
+        <p:nvSpPr>
+          <p:cNvPr id="50" name="C2-E25 text 48" descr="sci-ppt:o048"/>
+          <p:cNvSpPr txBox="1"/>
+          <p:nvPr/>
+        </p:nvSpPr>
+        <p:spPr>
+          <a:xfrm>
+            <a:off x="6866534" y="1490472"/>
+            <a:ext cx="771753" cy="216153"/>
+          </a:xfrm>
+          <a:prstGeom prst="rect">
+            <a:avLst/>
+          </a:prstGeom>
+          <a:noFill/>
+          <a:effectLst/>
+        </p:spPr>
+        <p:txBody>
+          <a:bodyPr wrap="none" lIns="18288" rIns="18288" tIns="18288" bIns="18288" anchor="t">
+            <a:spAutoFit/>
+          </a:bodyPr>
+          <a:lstStyle/>
+          <a:p>
+            <a:pPr algn="ctr">
+              <a:spcAft>
+                <a:spcPts val="0"/>
+              </a:spcAft>
+            </a:pPr>
+            <a:r>
+              <a:rPr sz="1100" b="0" i="0">
+                <a:solidFill>
+                  <a:srgbClr val="E7F0F3"/>
+                </a:solidFill>
+                <a:latin typeface="Arial"/>
+              </a:rPr>
+              <a:t>+3.2</a:t>
+            </a:r>
+          </a:p>
+        </p:txBody>
+      </p:sp>
+      <p:sp>
+        <p:nvSpPr>
+          <p:cNvPr id="51" name="C2-E25 text 49" descr="sci-ppt:o049"/>
+          <p:cNvSpPr txBox="1"/>
+          <p:nvPr/>
+        </p:nvSpPr>
+        <p:spPr>
+          <a:xfrm>
+            <a:off x="5516880" y="4907280"/>
+            <a:ext cx="2194560" cy="239395"/>
+          </a:xfrm>
+          <a:prstGeom prst="rect">
+            <a:avLst/>
+          </a:prstGeom>
+          <a:noFill/>
+          <a:effectLst/>
+        </p:spPr>
+        <p:txBody>
+          <a:bodyPr wrap="none" lIns="18288" rIns="18288" tIns="18288" bIns="18288" anchor="t">
+            <a:spAutoFit/>
+          </a:bodyPr>
+          <a:lstStyle/>
+          <a:p>
+            <a:pPr algn="ctr">
+              <a:spcAft>
+                <a:spcPts val="0"/>
+              </a:spcAft>
+            </a:pPr>
+            <a:r>
+              <a:rPr sz="1250" b="1" i="0">
+                <a:solidFill>
+                  <a:srgbClr val="B4C7D2"/>
+                </a:solidFill>
+                <a:latin typeface="Arial"/>
+              </a:rPr>
+              <a:t>collapse</a:t>
+            </a:r>
+          </a:p>
+        </p:txBody>
+      </p:sp>
+      <p:sp>
+        <p:nvSpPr>
+          <p:cNvPr id="52" name="C2-E25 rect 50" descr="sci-ppt:o050"/>
+          <p:cNvSpPr/>
+          <p:nvPr/>
+        </p:nvSpPr>
+        <p:spPr>
+          <a:xfrm>
+            <a:off x="1005840" y="5440680"/>
+            <a:ext cx="228600" cy="182880"/>
+          </a:xfrm>
+          <a:prstGeom prst="rect">
+            <a:avLst/>
+          </a:prstGeom>
+          <a:solidFill>
+            <a:srgbClr val="8EDBD4">
+              <a:alpha val="85000"/>
+            </a:srgbClr>
+          </a:solidFill>
+          <a:ln w="12700">
+            <a:solidFill>
+              <a:srgbClr val="8EDBD4">
+                <a:alpha val="85000"/>
+              </a:srgbClr>
+            </a:solidFill>
+          </a:ln>
+          <a:effectLst/>
+        </p:spPr>
+        <p:txBody>
+          <a:bodyPr rtlCol="0" anchor="ctr"/>
+          <a:lstStyle/>
+          <a:p>
+            <a:pPr algn="ctr"/>
+          </a:p>
+        </p:txBody>
+      </p:sp>
+      <p:sp>
+        <p:nvSpPr>
+          <p:cNvPr id="53" name="C2-E25 text 51" descr="sci-ppt:o051"/>
+          <p:cNvSpPr txBox="1"/>
+          <p:nvPr/>
+        </p:nvSpPr>
+        <p:spPr>
+          <a:xfrm>
+            <a:off x="1298448" y="5394960"/>
+            <a:ext cx="1463040" cy="216153"/>
+          </a:xfrm>
+          <a:prstGeom prst="rect">
+            <a:avLst/>
+          </a:prstGeom>
+          <a:noFill/>
+          <a:effectLst/>
+        </p:spPr>
+        <p:txBody>
+          <a:bodyPr wrap="none" lIns="18288" rIns="18288" tIns="18288" bIns="18288" anchor="t">
             <a:spAutoFit/>
           </a:bodyPr>
           <a:lstStyle/>
@@ -3293,61 +4843,41 @@
               </a:spcAft>
             </a:pPr>
             <a:r>
-              <a:rPr sz="1728" b="0" i="0">
+              <a:rPr sz="1100" b="0" i="0">
                 <a:solidFill>
                   <a:srgbClr val="E7F0F3"/>
                 </a:solidFill>
                 <a:latin typeface="Arial"/>
               </a:rPr>
-              <a:t>Temperature T_b</a:t>
-            </a:r>
-          </a:p>
-        </p:txBody>
-      </p:sp>
-      <p:cxnSp>
-        <p:nvCxnSpPr>
-          <p:cNvPr id="8" name="arrow7" descr="sci-ppt:C2-E25-007"/>
-          <p:cNvCxnSpPr/>
-          <p:nvPr/>
-        </p:nvCxnSpPr>
-        <p:spPr>
-          <a:xfrm flipH="1">
-            <a:off x="5974080" y="2743200"/>
-            <a:ext cx="243840" cy="975360"/>
-          </a:xfrm>
-          <a:prstGeom prst="line">
-            <a:avLst/>
-          </a:prstGeom>
-          <a:ln w="25400">
+              <a:t>ṁ/m (mass)</a:t>
+            </a:r>
+          </a:p>
+        </p:txBody>
+      </p:sp>
+      <p:sp>
+        <p:nvSpPr>
+          <p:cNvPr id="54" name="C2-E25 rect 52" descr="sci-ppt:o052"/>
+          <p:cNvSpPr/>
+          <p:nvPr/>
+        </p:nvSpPr>
+        <p:spPr>
+          <a:xfrm>
+            <a:off x="2743200" y="5440680"/>
+            <a:ext cx="228600" cy="182880"/>
+          </a:xfrm>
+          <a:prstGeom prst="rect">
+            <a:avLst/>
+          </a:prstGeom>
+          <a:solidFill>
+            <a:srgbClr val="F28BA0">
+              <a:alpha val="85000"/>
+            </a:srgbClr>
+          </a:solidFill>
+          <a:ln w="12700">
             <a:solidFill>
-              <a:srgbClr val="8EDBD4"/>
-            </a:solidFill>
-            <a:headEnd type="none" w="med" len="med"/>
-            <a:tailEnd type="triangle" w="med" len="med"/>
-          </a:ln>
-          <a:effectLst/>
-        </p:spPr>
-      </p:cxnSp>
-      <p:sp>
-        <p:nvSpPr>
-          <p:cNvPr id="9" name="rect8" descr="sci-ppt:C2-E25-008"/>
-          <p:cNvSpPr/>
-          <p:nvPr/>
-        </p:nvSpPr>
-        <p:spPr>
-          <a:xfrm>
-            <a:off x="8290560" y="1463040"/>
-            <a:ext cx="3413760" cy="1158240"/>
-          </a:xfrm>
-          <a:prstGeom prst="rect">
-            <a:avLst/>
-          </a:prstGeom>
-          <a:solidFill>
-            <a:srgbClr val="213E4B"/>
-          </a:solidFill>
-          <a:ln w="19050">
-            <a:solidFill>
-              <a:srgbClr val="B4C7D2"/>
+              <a:srgbClr val="F28BA0">
+                <a:alpha val="85000"/>
+              </a:srgbClr>
             </a:solidFill>
           </a:ln>
           <a:effectLst/>
@@ -3362,14 +4892,14 @@
       </p:sp>
       <p:sp>
         <p:nvSpPr>
-          <p:cNvPr id="10" name="text9" descr="sci-ppt:C2-E25-009"/>
+          <p:cNvPr id="55" name="C2-E25 text 53" descr="sci-ppt:o053"/>
           <p:cNvSpPr txBox="1"/>
           <p:nvPr/>
         </p:nvSpPr>
         <p:spPr>
           <a:xfrm>
-            <a:off x="8412480" y="1584960"/>
-            <a:ext cx="3230880" cy="340156"/>
+            <a:off x="3035808" y="5394960"/>
+            <a:ext cx="1463040" cy="216153"/>
           </a:xfrm>
           <a:prstGeom prst="rect">
             <a:avLst/>
@@ -3378,7 +4908,7 @@
           <a:effectLst/>
         </p:spPr>
         <p:txBody>
-          <a:bodyPr wrap="none" lIns="27432" rIns="27432" tIns="18288" bIns="18288" anchor="ctr">
+          <a:bodyPr wrap="none" lIns="18288" rIns="18288" tIns="18288" bIns="18288" anchor="t">
             <a:spAutoFit/>
           </a:bodyPr>
           <a:lstStyle/>
@@ -3389,61 +4919,41 @@
               </a:spcAft>
             </a:pPr>
             <a:r>
-              <a:rPr sz="1728" b="0" i="0">
+              <a:rPr sz="1100" b="0" i="0">
                 <a:solidFill>
                   <a:srgbClr val="E7F0F3"/>
                 </a:solidFill>
                 <a:latin typeface="Arial"/>
               </a:rPr>
-              <a:t>Bubble volume V_b</a:t>
-            </a:r>
-          </a:p>
-        </p:txBody>
-      </p:sp>
-      <p:cxnSp>
-        <p:nvCxnSpPr>
-          <p:cNvPr id="11" name="arrow10" descr="sci-ppt:C2-E25-010"/>
-          <p:cNvCxnSpPr/>
-          <p:nvPr/>
-        </p:nvCxnSpPr>
-        <p:spPr>
-          <a:xfrm flipH="1">
-            <a:off x="5974080" y="2743200"/>
-            <a:ext cx="4023360" cy="975360"/>
-          </a:xfrm>
-          <a:prstGeom prst="line">
-            <a:avLst/>
-          </a:prstGeom>
-          <a:ln w="25400">
+              <a:t>Ṫ/T (temperature)</a:t>
+            </a:r>
+          </a:p>
+        </p:txBody>
+      </p:sp>
+      <p:sp>
+        <p:nvSpPr>
+          <p:cNvPr id="56" name="C2-E25 rect 54" descr="sci-ppt:o054"/>
+          <p:cNvSpPr/>
+          <p:nvPr/>
+        </p:nvSpPr>
+        <p:spPr>
+          <a:xfrm>
+            <a:off x="4480560" y="5440680"/>
+            <a:ext cx="228600" cy="182880"/>
+          </a:xfrm>
+          <a:prstGeom prst="rect">
+            <a:avLst/>
+          </a:prstGeom>
+          <a:solidFill>
+            <a:srgbClr val="F2B880">
+              <a:alpha val="85000"/>
+            </a:srgbClr>
+          </a:solidFill>
+          <a:ln w="12700">
             <a:solidFill>
-              <a:srgbClr val="8EDBD4"/>
-            </a:solidFill>
-            <a:headEnd type="none" w="med" len="med"/>
-            <a:tailEnd type="triangle" w="med" len="med"/>
-          </a:ln>
-          <a:effectLst/>
-        </p:spPr>
-      </p:cxnSp>
-      <p:sp>
-        <p:nvSpPr>
-          <p:cNvPr id="12" name="rect11" descr="sci-ppt:C2-E25-011"/>
-          <p:cNvSpPr/>
-          <p:nvPr/>
-        </p:nvSpPr>
-        <p:spPr>
-          <a:xfrm>
-            <a:off x="3779520" y="3596640"/>
-            <a:ext cx="4389120" cy="792480"/>
-          </a:xfrm>
-          <a:prstGeom prst="rect">
-            <a:avLst/>
-          </a:prstGeom>
-          <a:solidFill>
-            <a:srgbClr val="213E4B"/>
-          </a:solidFill>
-          <a:ln w="19050">
-            <a:solidFill>
-              <a:srgbClr val="B4C7D2"/>
+              <a:srgbClr val="F2B880">
+                <a:alpha val="85000"/>
+              </a:srgbClr>
             </a:solidFill>
           </a:ln>
           <a:effectLst/>
@@ -3458,14 +4968,14 @@
       </p:sp>
       <p:sp>
         <p:nvSpPr>
-          <p:cNvPr id="13" name="text12" descr="sci-ppt:C2-E25-012"/>
+          <p:cNvPr id="57" name="C2-E25 text 55" descr="sci-ppt:o055"/>
           <p:cNvSpPr txBox="1"/>
           <p:nvPr/>
         </p:nvSpPr>
         <p:spPr>
           <a:xfrm>
-            <a:off x="3901440" y="3718560"/>
-            <a:ext cx="4206240" cy="340156"/>
+            <a:off x="4773168" y="5394960"/>
+            <a:ext cx="1463040" cy="216153"/>
           </a:xfrm>
           <a:prstGeom prst="rect">
             <a:avLst/>
@@ -3474,7 +4984,7 @@
           <a:effectLst/>
         </p:spPr>
         <p:txBody>
-          <a:bodyPr wrap="none" lIns="27432" rIns="27432" tIns="18288" bIns="18288" anchor="ctr">
+          <a:bodyPr wrap="none" lIns="18288" rIns="18288" tIns="18288" bIns="18288" anchor="t">
             <a:spAutoFit/>
           </a:bodyPr>
           <a:lstStyle/>
@@ -3485,27 +4995,63 @@
               </a:spcAft>
             </a:pPr>
             <a:r>
-              <a:rPr sz="1728" b="0" i="0">
+              <a:rPr sz="1100" b="0" i="0">
                 <a:solidFill>
                   <a:srgbClr val="E7F0F3"/>
                 </a:solidFill>
                 <a:latin typeface="Arial"/>
               </a:rPr>
-              <a:t>Mixture pressure p_b</a:t>
-            </a:r>
-          </a:p>
-        </p:txBody>
-      </p:sp>
-      <p:sp>
-        <p:nvSpPr>
-          <p:cNvPr id="14" name="text13" descr="sci-ppt:C2-E25-013"/>
+              <a:t>−3Ṙ/R (volume)</a:t>
+            </a:r>
+          </a:p>
+        </p:txBody>
+      </p:sp>
+      <p:sp>
+        <p:nvSpPr>
+          <p:cNvPr id="58" name="C2-E25 rect 56" descr="sci-ppt:o056"/>
+          <p:cNvSpPr/>
+          <p:nvPr/>
+        </p:nvSpPr>
+        <p:spPr>
+          <a:xfrm>
+            <a:off x="6217919" y="5440680"/>
+            <a:ext cx="228600" cy="182880"/>
+          </a:xfrm>
+          <a:prstGeom prst="rect">
+            <a:avLst/>
+          </a:prstGeom>
+          <a:solidFill>
+            <a:srgbClr val="FFFFFF">
+              <a:alpha val="40000"/>
+            </a:srgbClr>
+          </a:solidFill>
+          <a:ln w="12700">
+            <a:solidFill>
+              <a:srgbClr val="FFFFFF">
+                <a:alpha val="40000"/>
+              </a:srgbClr>
+            </a:solidFill>
+          </a:ln>
+          <a:effectLst/>
+        </p:spPr>
+        <p:txBody>
+          <a:bodyPr rtlCol="0" anchor="ctr"/>
+          <a:lstStyle/>
+          <a:p>
+            <a:pPr algn="ctr"/>
+          </a:p>
+        </p:txBody>
+      </p:sp>
+      <p:sp>
+        <p:nvSpPr>
+          <p:cNvPr id="59" name="C2-E25 text 57" descr="sci-ppt:o057"/>
           <p:cNvSpPr txBox="1"/>
           <p:nvPr/>
         </p:nvSpPr>
         <p:spPr>
           <a:xfrm>
-            <a:off x="365760" y="4974336"/>
-            <a:ext cx="5547360" cy="321259"/>
+            <a:off x="6510527" y="5394960"/>
+            <a:ext cx="1463040" cy="216153"/>
           </a:xfrm>
           <a:prstGeom prst="rect">
             <a:avLst/>
@@ -3514,7 +5060,7 @@
           <a:effectLst/>
         </p:spPr>
         <p:txBody>
-          <a:bodyPr wrap="none" lIns="27432" rIns="27432" tIns="18288" bIns="18288" anchor="ctr">
+          <a:bodyPr wrap="none" lIns="18288" rIns="18288" tIns="18288" bIns="18288" anchor="t">
             <a:spAutoFit/>
           </a:bodyPr>
           <a:lstStyle/>
@@ -3525,27 +5071,59 @@
               </a:spcAft>
             </a:pPr>
             <a:r>
-              <a:rPr sz="1632" b="0" i="0">
+              <a:rPr sz="1100" b="0" i="0">
                 <a:solidFill>
                   <a:srgbClr val="E7F0F3"/>
                 </a:solidFill>
                 <a:latin typeface="Arial"/>
               </a:rPr>
-              <a:t>p_v,s, ṗ_v,s: partial pressure change</a:t>
-            </a:r>
-          </a:p>
-        </p:txBody>
-      </p:sp>
-      <p:sp>
-        <p:nvSpPr>
-          <p:cNvPr id="15" name="text14" descr="sci-ppt:C2-E25-014"/>
+              <a:t>ṗ/p (total)</a:t>
+            </a:r>
+          </a:p>
+        </p:txBody>
+      </p:sp>
+      <p:sp>
+        <p:nvSpPr>
+          <p:cNvPr id="60" name="C2-E25 round_rect 58" descr="sci-ppt:o058"/>
+          <p:cNvSpPr/>
+          <p:nvPr/>
+        </p:nvSpPr>
+        <p:spPr>
+          <a:xfrm>
+            <a:off x="7955279" y="1371600"/>
+            <a:ext cx="3886200" cy="3657600"/>
+          </a:xfrm>
+          <a:prstGeom prst="roundRect">
+            <a:avLst/>
+          </a:prstGeom>
+          <a:solidFill>
+            <a:srgbClr val="213E4B"/>
+          </a:solidFill>
+          <a:ln w="20320">
+            <a:solidFill>
+              <a:srgbClr val="8EDBD4"/>
+            </a:solidFill>
+          </a:ln>
+          <a:effectLst/>
+        </p:spPr>
+        <p:txBody>
+          <a:bodyPr rtlCol="0" anchor="ctr"/>
+          <a:lstStyle/>
+          <a:p>
+            <a:pPr algn="ctr"/>
+          </a:p>
+        </p:txBody>
+      </p:sp>
+      <p:sp>
+        <p:nvSpPr>
+          <p:cNvPr id="61" name="C2-E25 text 59" descr="sci-ppt:o059"/>
           <p:cNvSpPr txBox="1"/>
           <p:nvPr/>
         </p:nvSpPr>
         <p:spPr>
           <a:xfrm>
-            <a:off x="365760" y="5266944"/>
-            <a:ext cx="5547360" cy="321259"/>
+            <a:off x="8065007" y="1426464"/>
+            <a:ext cx="3666744" cy="254889"/>
           </a:xfrm>
           <a:prstGeom prst="rect">
             <a:avLst/>
@@ -3554,7 +5132,7 @@
           <a:effectLst/>
         </p:spPr>
         <p:txBody>
-          <a:bodyPr wrap="none" lIns="27432" rIns="27432" tIns="18288" bIns="18288" anchor="ctr">
+          <a:bodyPr wrap="none" lIns="18288" rIns="18288" tIns="18288" bIns="18288" anchor="t">
             <a:spAutoFit/>
           </a:bodyPr>
           <a:lstStyle/>
@@ -3565,27 +5143,67 @@
               </a:spcAft>
             </a:pPr>
             <a:r>
-              <a:rPr sz="1632" b="0" i="0">
+              <a:rPr sz="1350" b="1" i="0">
+                <a:solidFill>
+                  <a:srgbClr val="8EDBD4"/>
+                </a:solidFill>
+                <a:latin typeface="Arial"/>
+              </a:rPr>
+              <a:t>Three drivers of pressure</a:t>
+            </a:r>
+          </a:p>
+        </p:txBody>
+      </p:sp>
+      <p:sp>
+        <p:nvSpPr>
+          <p:cNvPr id="62" name="C2-E25 text 60" descr="sci-ppt:o060"/>
+          <p:cNvSpPr txBox="1"/>
+          <p:nvPr/>
+        </p:nvSpPr>
+        <p:spPr>
+          <a:xfrm>
+            <a:off x="8092440" y="1828800"/>
+            <a:ext cx="3657600" cy="239395"/>
+          </a:xfrm>
+          <a:prstGeom prst="rect">
+            <a:avLst/>
+          </a:prstGeom>
+          <a:noFill/>
+          <a:effectLst/>
+        </p:spPr>
+        <p:txBody>
+          <a:bodyPr wrap="none" lIns="18288" rIns="18288" tIns="18288" bIns="18288" anchor="t">
+            <a:spAutoFit/>
+          </a:bodyPr>
+          <a:lstStyle/>
+          <a:p>
+            <a:pPr algn="l">
+              <a:spcAft>
+                <a:spcPts val="0"/>
+              </a:spcAft>
+            </a:pPr>
+            <a:r>
+              <a:rPr sz="1250" b="1" i="0">
                 <a:solidFill>
                   <a:srgbClr val="E7F0F3"/>
                 </a:solidFill>
                 <a:latin typeface="Arial"/>
               </a:rPr>
-              <a:t>T_b, Ṫ_b: heating or cooling</a:t>
-            </a:r>
-          </a:p>
-        </p:txBody>
-      </p:sp>
-      <p:sp>
-        <p:nvSpPr>
-          <p:cNvPr id="16" name="text15" descr="sci-ppt:C2-E25-015"/>
+              <a:t>ṗᵥ,s / pᵥ,s = ṁᵥ,s/mᵥ,s + Ṫ_b/T_b − 3Ṙ/R</a:t>
+            </a:r>
+          </a:p>
+        </p:txBody>
+      </p:sp>
+      <p:sp>
+        <p:nvSpPr>
+          <p:cNvPr id="63" name="C2-E25 text 61" descr="sci-ppt:o061"/>
           <p:cNvSpPr txBox="1"/>
           <p:nvPr/>
         </p:nvSpPr>
         <p:spPr>
           <a:xfrm>
-            <a:off x="365760" y="5559552"/>
-            <a:ext cx="5547360" cy="321259"/>
+            <a:off x="8293608" y="2606040"/>
+            <a:ext cx="3456432" cy="417576"/>
           </a:xfrm>
           <a:prstGeom prst="rect">
             <a:avLst/>
@@ -3594,7 +5212,7 @@
           <a:effectLst/>
         </p:spPr>
         <p:txBody>
-          <a:bodyPr wrap="none" lIns="27432" rIns="27432" tIns="18288" bIns="18288" anchor="ctr">
+          <a:bodyPr wrap="none" lIns="18288" rIns="18288" tIns="18288" bIns="18288" anchor="t">
             <a:spAutoFit/>
           </a:bodyPr>
           <a:lstStyle/>
@@ -3605,39 +5223,15 @@
               </a:spcAft>
             </a:pPr>
             <a:r>
-              <a:rPr sz="1632" b="0" i="0">
+              <a:rPr sz="1200" b="0" i="0">
                 <a:solidFill>
                   <a:srgbClr val="E7F0F3"/>
                 </a:solidFill>
                 <a:latin typeface="Arial"/>
               </a:rPr>
-              <a:t>R, Ṙ: spherical volume change</a:t>
-            </a:r>
-          </a:p>
-        </p:txBody>
-      </p:sp>
-      <p:sp>
-        <p:nvSpPr>
-          <p:cNvPr id="17" name="text16" descr="sci-ppt:C2-E25-016"/>
-          <p:cNvSpPr txBox="1"/>
-          <p:nvPr/>
-        </p:nvSpPr>
-        <p:spPr>
-          <a:xfrm>
-            <a:off x="6156960" y="4974336"/>
-            <a:ext cx="5547360" cy="321259"/>
-          </a:xfrm>
-          <a:prstGeom prst="rect">
-            <a:avLst/>
-          </a:prstGeom>
-          <a:noFill/>
-          <a:effectLst/>
-        </p:spPr>
-        <p:txBody>
-          <a:bodyPr wrap="none" lIns="27432" rIns="27432" tIns="18288" bIns="18288" anchor="ctr">
-            <a:spAutoFit/>
-          </a:bodyPr>
-          <a:lstStyle/>
+              <a:t>Evaporation raises p; cooling lowers it;</a:t>
+            </a:r>
+          </a:p>
           <a:p>
             <a:pPr algn="l">
               <a:spcAft>
@@ -3645,27 +5239,59 @@
               </a:spcAft>
             </a:pPr>
             <a:r>
-              <a:rPr sz="1632" b="0" i="0">
+              <a:rPr sz="1200" b="0" i="0">
                 <a:solidFill>
                   <a:srgbClr val="E7F0F3"/>
                 </a:solidFill>
                 <a:latin typeface="Arial"/>
               </a:rPr>
-              <a:t>m_v,s, ṁ_v,s: evaporation or loss</a:t>
-            </a:r>
-          </a:p>
-        </p:txBody>
-      </p:sp>
-      <p:sp>
-        <p:nvSpPr>
-          <p:cNvPr id="18" name="text17" descr="sci-ppt:C2-E25-017"/>
+              <a:t>volume growth lowers it quickly.</a:t>
+            </a:r>
+          </a:p>
+        </p:txBody>
+      </p:sp>
+      <p:sp>
+        <p:nvSpPr>
+          <p:cNvPr id="64" name="C2-E25 ellipse 62" descr="sci-ppt:o062"/>
+          <p:cNvSpPr/>
+          <p:nvPr/>
+        </p:nvSpPr>
+        <p:spPr>
+          <a:xfrm>
+            <a:off x="8124444" y="2659380"/>
+            <a:ext cx="82296" cy="82296"/>
+          </a:xfrm>
+          <a:prstGeom prst="ellipse">
+            <a:avLst/>
+          </a:prstGeom>
+          <a:solidFill>
+            <a:srgbClr val="8EDBD4"/>
+          </a:solidFill>
+          <a:ln w="12700">
+            <a:solidFill>
+              <a:srgbClr val="8EDBD4"/>
+            </a:solidFill>
+          </a:ln>
+          <a:effectLst/>
+        </p:spPr>
+        <p:txBody>
+          <a:bodyPr rtlCol="0" anchor="ctr"/>
+          <a:lstStyle/>
+          <a:p>
+            <a:pPr algn="ctr"/>
+          </a:p>
+        </p:txBody>
+      </p:sp>
+      <p:sp>
+        <p:nvSpPr>
+          <p:cNvPr id="65" name="C2-E25 text 63" descr="sci-ppt:o063"/>
           <p:cNvSpPr txBox="1"/>
           <p:nvPr/>
         </p:nvSpPr>
         <p:spPr>
           <a:xfrm>
-            <a:off x="6156960" y="5266944"/>
-            <a:ext cx="5547360" cy="321259"/>
+            <a:off x="8293608" y="3069336"/>
+            <a:ext cx="3456432" cy="417576"/>
           </a:xfrm>
           <a:prstGeom prst="rect">
             <a:avLst/>
@@ -3674,7 +5300,7 @@
           <a:effectLst/>
         </p:spPr>
         <p:txBody>
-          <a:bodyPr wrap="none" lIns="27432" rIns="27432" tIns="18288" bIns="18288" anchor="ctr">
+          <a:bodyPr wrap="none" lIns="18288" rIns="18288" tIns="18288" bIns="18288" anchor="t">
             <a:spAutoFit/>
           </a:bodyPr>
           <a:lstStyle/>
@@ -3685,39 +5311,15 @@
               </a:spcAft>
             </a:pPr>
             <a:r>
-              <a:rPr sz="1632" b="0" i="0">
+              <a:rPr sz="1200" b="0" i="0">
                 <a:solidFill>
                   <a:srgbClr val="E7F0F3"/>
                 </a:solidFill>
                 <a:latin typeface="Arial"/>
               </a:rPr>
-              <a:t>V_b, V̇_b: geometric expansion</a:t>
-            </a:r>
-          </a:p>
-        </p:txBody>
-      </p:sp>
-      <p:sp>
-        <p:nvSpPr>
-          <p:cNvPr id="19" name="text18" descr="sci-ppt:C2-E25-018"/>
-          <p:cNvSpPr txBox="1"/>
-          <p:nvPr/>
-        </p:nvSpPr>
-        <p:spPr>
-          <a:xfrm>
-            <a:off x="6156960" y="5559552"/>
-            <a:ext cx="5547360" cy="321259"/>
-          </a:xfrm>
-          <a:prstGeom prst="rect">
-            <a:avLst/>
-          </a:prstGeom>
-          <a:noFill/>
-          <a:effectLst/>
-        </p:spPr>
-        <p:txBody>
-          <a:bodyPr wrap="none" lIns="27432" rIns="27432" tIns="18288" bIns="18288" anchor="ctr">
-            <a:spAutoFit/>
-          </a:bodyPr>
-          <a:lstStyle/>
+              <a:t>A law written in R alone keeps only the</a:t>
+            </a:r>
+          </a:p>
           <a:p>
             <a:pPr algn="l">
               <a:spcAft>
@@ -3725,27 +5327,59 @@
               </a:spcAft>
             </a:pPr>
             <a:r>
-              <a:rPr sz="1632" b="0" i="0">
+              <a:rPr sz="1200" b="0" i="0">
                 <a:solidFill>
                   <a:srgbClr val="E7F0F3"/>
                 </a:solidFill>
                 <a:latin typeface="Arial"/>
               </a:rPr>
-              <a:t>s: species index</a:t>
-            </a:r>
-          </a:p>
-        </p:txBody>
-      </p:sp>
-      <p:sp>
-        <p:nvSpPr>
-          <p:cNvPr id="20" name="text19" descr="sci-ppt:C2-E25-019"/>
+              <a:t>third term.</a:t>
+            </a:r>
+          </a:p>
+        </p:txBody>
+      </p:sp>
+      <p:sp>
+        <p:nvSpPr>
+          <p:cNvPr id="66" name="C2-E25 ellipse 64" descr="sci-ppt:o064"/>
+          <p:cNvSpPr/>
+          <p:nvPr/>
+        </p:nvSpPr>
+        <p:spPr>
+          <a:xfrm>
+            <a:off x="8124444" y="3122676"/>
+            <a:ext cx="82296" cy="82296"/>
+          </a:xfrm>
+          <a:prstGeom prst="ellipse">
+            <a:avLst/>
+          </a:prstGeom>
+          <a:solidFill>
+            <a:srgbClr val="8EDBD4"/>
+          </a:solidFill>
+          <a:ln w="12700">
+            <a:solidFill>
+              <a:srgbClr val="8EDBD4"/>
+            </a:solidFill>
+          </a:ln>
+          <a:effectLst/>
+        </p:spPr>
+        <p:txBody>
+          <a:bodyPr rtlCol="0" anchor="ctr"/>
+          <a:lstStyle/>
+          <a:p>
+            <a:pPr algn="ctr"/>
+          </a:p>
+        </p:txBody>
+      </p:sp>
+      <p:sp>
+        <p:nvSpPr>
+          <p:cNvPr id="67" name="C2-E25 text 65" descr="sci-ppt:o065"/>
           <p:cNvSpPr txBox="1"/>
           <p:nvPr/>
         </p:nvSpPr>
         <p:spPr>
           <a:xfrm>
-            <a:off x="365760" y="6278880"/>
-            <a:ext cx="11277600" cy="302361"/>
+            <a:off x="8293608" y="3532631"/>
+            <a:ext cx="3456432" cy="417576"/>
           </a:xfrm>
           <a:prstGeom prst="rect">
             <a:avLst/>
@@ -3754,7 +5388,7 @@
           <a:effectLst/>
         </p:spPr>
         <p:txBody>
-          <a:bodyPr wrap="none" lIns="27432" rIns="27432" tIns="18288" bIns="18288" anchor="ctr">
+          <a:bodyPr wrap="none" lIns="18288" rIns="18288" tIns="18288" bIns="18288" anchor="t">
             <a:spAutoFit/>
           </a:bodyPr>
           <a:lstStyle/>
@@ -3765,27 +5399,115 @@
               </a:spcAft>
             </a:pPr>
             <a:r>
-              <a:rPr sz="1536" b="0" i="0">
+              <a:rPr sz="1200" b="0" i="0">
+                <a:solidFill>
+                  <a:srgbClr val="E7F0F3"/>
+                </a:solidFill>
+                <a:latin typeface="Arial"/>
+              </a:rPr>
+              <a:t>A bubble can lose pressure while still</a:t>
+            </a:r>
+          </a:p>
+          <a:p>
+            <a:pPr algn="l">
+              <a:spcAft>
+                <a:spcPts val="0"/>
+              </a:spcAft>
+            </a:pPr>
+            <a:r>
+              <a:rPr sz="1200" b="0" i="0">
+                <a:solidFill>
+                  <a:srgbClr val="E7F0F3"/>
+                </a:solidFill>
+                <a:latin typeface="Arial"/>
+              </a:rPr>
+              <a:t>evaporating if the volume term dominates.</a:t>
+            </a:r>
+          </a:p>
+        </p:txBody>
+      </p:sp>
+      <p:sp>
+        <p:nvSpPr>
+          <p:cNvPr id="68" name="C2-E25 ellipse 66" descr="sci-ppt:o066"/>
+          <p:cNvSpPr/>
+          <p:nvPr/>
+        </p:nvSpPr>
+        <p:spPr>
+          <a:xfrm>
+            <a:off x="8124444" y="3585972"/>
+            <a:ext cx="82296" cy="82296"/>
+          </a:xfrm>
+          <a:prstGeom prst="ellipse">
+            <a:avLst/>
+          </a:prstGeom>
+          <a:solidFill>
+            <a:srgbClr val="8EDBD4"/>
+          </a:solidFill>
+          <a:ln w="12700">
+            <a:solidFill>
+              <a:srgbClr val="8EDBD4"/>
+            </a:solidFill>
+          </a:ln>
+          <a:effectLst/>
+        </p:spPr>
+        <p:txBody>
+          <a:bodyPr rtlCol="0" anchor="ctr"/>
+          <a:lstStyle/>
+          <a:p>
+            <a:pPr algn="ctr"/>
+          </a:p>
+        </p:txBody>
+      </p:sp>
+      <p:sp>
+        <p:nvSpPr>
+          <p:cNvPr id="69" name="C2-E25 text 67" descr="sci-ppt:o067"/>
+          <p:cNvSpPr txBox="1"/>
+          <p:nvPr/>
+        </p:nvSpPr>
+        <p:spPr>
+          <a:xfrm>
+            <a:off x="914400" y="5852160"/>
+            <a:ext cx="10972800" cy="231648"/>
+          </a:xfrm>
+          <a:prstGeom prst="rect">
+            <a:avLst/>
+          </a:prstGeom>
+          <a:noFill/>
+          <a:effectLst/>
+        </p:spPr>
+        <p:txBody>
+          <a:bodyPr wrap="none" lIns="18288" rIns="18288" tIns="18288" bIns="18288" anchor="t">
+            <a:spAutoFit/>
+          </a:bodyPr>
+          <a:lstStyle/>
+          <a:p>
+            <a:pPr algn="l">
+              <a:spcAft>
+                <a:spcPts val="0"/>
+              </a:spcAft>
+            </a:pPr>
+            <a:r>
+              <a:rPr sz="1200" b="0" i="0">
                 <a:solidFill>
                   <a:srgbClr val="B4C7D2"/>
                 </a:solidFill>
                 <a:latin typeface="Arial"/>
               </a:rPr>
-              <a:t>Expansion lowers pressure at fixed mass and temperature</a:t>
-            </a:r>
-          </a:p>
-        </p:txBody>
-      </p:sp>
-      <p:sp>
-        <p:nvSpPr>
-          <p:cNvPr id="21" name="text20" descr="sci-ppt:C2-E25-020"/>
+              <a:t>Rates are illustrative, chosen only to show how the three terms can compete. Identity valid for a spherical bubble (V_b = 4πR³/3).</a:t>
+            </a:r>
+          </a:p>
+        </p:txBody>
+      </p:sp>
+      <p:sp>
+        <p:nvSpPr>
+          <p:cNvPr id="70" name="C2-E25 text 68" descr="sci-ppt:o068"/>
           <p:cNvSpPr txBox="1"/>
           <p:nvPr/>
         </p:nvSpPr>
         <p:spPr>
           <a:xfrm>
-            <a:off x="365760" y="6571488"/>
-            <a:ext cx="11277600" cy="302361"/>
+            <a:off x="320040" y="6510528"/>
+            <a:ext cx="11521440" cy="200660"/>
           </a:xfrm>
           <a:prstGeom prst="rect">
             <a:avLst/>
@@ -3794,7 +5516,7 @@
           <a:effectLst/>
         </p:spPr>
         <p:txBody>
-          <a:bodyPr wrap="none" lIns="27432" rIns="27432" tIns="18288" bIns="18288" anchor="ctr">
+          <a:bodyPr wrap="none" lIns="18288" rIns="18288" tIns="18288" bIns="18288" anchor="t">
             <a:spAutoFit/>
           </a:bodyPr>
           <a:lstStyle/>
@@ -3805,13 +5527,13 @@
               </a:spcAft>
             </a:pPr>
             <a:r>
-              <a:rPr sz="1536" b="0" i="0">
+              <a:rPr sz="1000" b="0" i="0">
                 <a:solidFill>
                   <a:srgbClr val="B4C7D2"/>
                 </a:solidFill>
                 <a:latin typeface="Arial"/>
               </a:rPr>
-              <a:t>Evaporation or heating can oppose the geometric pressure decrease</a:t>
+              <a:t>Logarithmic derivative of the ideal-gas law, Eq. C2-E25.</a:t>
             </a:r>
           </a:p>
         </p:txBody>
